--- a/business/friday_send/01_front_of_room/ATOMiK_Investor_Deck.pptx
+++ b/business/friday_send/01_front_of_room/ATOMiK_Investor_Deck.pptx
@@ -4046,7 +4046,7 @@
       </p:sp>
       <p:pic>
         <p:nvPicPr>
-          <p:cNvPr id="25" name="Picture 24" descr="09-current-live-atomik-desk-v039k.png"/>
+          <p:cNvPr id="25" name="Picture 24" descr="10-current-live-atomik-desk-v040a.png"/>
           <p:cNvPicPr>
             <a:picLocks noChangeAspect="1"/>
           </p:cNvPicPr>
@@ -4459,7 +4459,7 @@
       </p:sp>
       <p:pic>
         <p:nvPicPr>
-          <p:cNvPr id="9" name="Picture 8" descr="09-current-live-atomik-desk-v039k.png"/>
+          <p:cNvPr id="9" name="Picture 8" descr="10-current-live-atomik-desk-v040a.png"/>
           <p:cNvPicPr>
             <a:picLocks noChangeAspect="1"/>
           </p:cNvPicPr>
@@ -4644,7 +4644,7 @@
                 </a:solidFill>
                 <a:latin typeface="Aptos"/>
               </a:rPr>
-              <a:t>current Zynq hardware UI/demo surface</a:t>
+              <a:t>current Zynq UI captured from /dev/fb0, driven by real measured on-board data</a:t>
             </a:r>
           </a:p>
         </p:txBody>
@@ -4980,7 +4980,7 @@
                 </a:solidFill>
                 <a:latin typeface="Aptos"/>
               </a:rPr>
-              <a:t>on-screen telemetry as customer benchmark</a:t>
+              <a:t>on-screen telemetry as customer benchmark; not an interactive demo</a:t>
             </a:r>
           </a:p>
         </p:txBody>
@@ -5296,7 +5296,7 @@
         </p:nvSpPr>
         <p:spPr>
           <a:xfrm>
-            <a:off x="822960" y="1847088"/>
+            <a:off x="822960" y="1755648"/>
             <a:ext cx="10561320" cy="457200"/>
           </a:xfrm>
           <a:prstGeom prst="roundRect">
@@ -5343,7 +5343,7 @@
         </p:nvSpPr>
         <p:spPr>
           <a:xfrm>
-            <a:off x="1024128" y="1956816"/>
+            <a:off x="1024128" y="1865376"/>
             <a:ext cx="2743200" cy="146304"/>
           </a:xfrm>
           <a:prstGeom prst="rect">
@@ -5369,7 +5369,7 @@
                 </a:solidFill>
                 <a:latin typeface="Aptos"/>
               </a:rPr>
-              <a:t>Zynq Desk v0.39-K</a:t>
+              <a:t>Zynq Desk v0.40-A</a:t>
             </a:r>
           </a:p>
         </p:txBody>
@@ -5382,7 +5382,7 @@
         </p:nvSpPr>
         <p:spPr>
           <a:xfrm>
-            <a:off x="3931920" y="1956816"/>
+            <a:off x="3931920" y="1865376"/>
             <a:ext cx="2194560" cy="146304"/>
           </a:xfrm>
           <a:prstGeom prst="rect">
@@ -5421,7 +5421,7 @@
         </p:nvSpPr>
         <p:spPr>
           <a:xfrm>
-            <a:off x="6309360" y="1956816"/>
+            <a:off x="6309360" y="1865376"/>
             <a:ext cx="4709160" cy="146304"/>
           </a:xfrm>
           <a:prstGeom prst="rect">
@@ -5447,7 +5447,7 @@
                 </a:solidFill>
                 <a:latin typeface="Aptos"/>
               </a:rPr>
-              <a:t>current UI proof image</a:t>
+              <a:t>current UI proof image, captured from /dev/fb0</a:t>
             </a:r>
           </a:p>
         </p:txBody>
@@ -5460,7 +5460,7 @@
         </p:nvSpPr>
         <p:spPr>
           <a:xfrm>
-            <a:off x="822960" y="2505456"/>
+            <a:off x="822960" y="2340864"/>
             <a:ext cx="10561320" cy="457200"/>
           </a:xfrm>
           <a:prstGeom prst="roundRect">
@@ -5507,7 +5507,7 @@
         </p:nvSpPr>
         <p:spPr>
           <a:xfrm>
-            <a:off x="1024128" y="2615184"/>
+            <a:off x="1024128" y="2450592"/>
             <a:ext cx="2743200" cy="146304"/>
           </a:xfrm>
           <a:prstGeom prst="rect">
@@ -5533,7 +5533,7 @@
                 </a:solidFill>
                 <a:latin typeface="Aptos"/>
               </a:rPr>
-              <a:t>Linux userspace to FPGA</a:t>
+              <a:t>Parallel-bank throughput</a:t>
             </a:r>
           </a:p>
         </p:txBody>
@@ -5546,7 +5546,7 @@
         </p:nvSpPr>
         <p:spPr>
           <a:xfrm>
-            <a:off x="3931920" y="2615184"/>
+            <a:off x="3931920" y="2450592"/>
             <a:ext cx="2194560" cy="146304"/>
           </a:xfrm>
           <a:prstGeom prst="rect">
@@ -5568,11 +5568,11 @@
             <a:r>
               <a:rPr sz="919" b="1">
                 <a:solidFill>
-                  <a:srgbClr val="22D3EE"/>
-                </a:solidFill>
-                <a:latin typeface="Aptos"/>
-              </a:rPr>
-              <a:t>HARDWARE_VALIDATED</a:t>
+                  <a:srgbClr val="60A5FA"/>
+                </a:solidFill>
+                <a:latin typeface="Aptos"/>
+              </a:rPr>
+              <a:t>LIVE_MEASURED</a:t>
             </a:r>
           </a:p>
         </p:txBody>
@@ -5585,7 +5585,7 @@
         </p:nvSpPr>
         <p:spPr>
           <a:xfrm>
-            <a:off x="6309360" y="2615184"/>
+            <a:off x="6309360" y="2450592"/>
             <a:ext cx="4709160" cy="146304"/>
           </a:xfrm>
           <a:prstGeom prst="rect">
@@ -5611,7 +5611,7 @@
                 </a:solidFill>
                 <a:latin typeface="Aptos"/>
               </a:rPr>
-              <a:t>documented OS-to-bus path</a:t>
+              <a:t>AX7020 8-bank accumulator scales 1/2/4/8x, byte-identical to software</a:t>
             </a:r>
           </a:p>
         </p:txBody>
@@ -5624,7 +5624,7 @@
         </p:nvSpPr>
         <p:spPr>
           <a:xfrm>
-            <a:off x="822960" y="3163824"/>
+            <a:off x="822960" y="2926080"/>
             <a:ext cx="10561320" cy="457200"/>
           </a:xfrm>
           <a:prstGeom prst="roundRect">
@@ -5671,7 +5671,7 @@
         </p:nvSpPr>
         <p:spPr>
           <a:xfrm>
-            <a:off x="1024128" y="3273552"/>
+            <a:off x="1024128" y="3035808"/>
             <a:ext cx="2743200" cy="146304"/>
           </a:xfrm>
           <a:prstGeom prst="rect">
@@ -5697,7 +5697,7 @@
                 </a:solidFill>
                 <a:latin typeface="Aptos"/>
               </a:rPr>
-              <a:t>AX7020 board matrix</a:t>
+              <a:t>Linux userspace to FPGA</a:t>
             </a:r>
           </a:p>
         </p:txBody>
@@ -5710,7 +5710,7 @@
         </p:nvSpPr>
         <p:spPr>
           <a:xfrm>
-            <a:off x="3931920" y="3273552"/>
+            <a:off x="3931920" y="3035808"/>
             <a:ext cx="2194560" cy="146304"/>
           </a:xfrm>
           <a:prstGeom prst="rect">
@@ -5732,11 +5732,11 @@
             <a:r>
               <a:rPr sz="919" b="1">
                 <a:solidFill>
-                  <a:srgbClr val="60A5FA"/>
-                </a:solidFill>
-                <a:latin typeface="Aptos"/>
-              </a:rPr>
-              <a:t>LIVE_MEASURED</a:t>
+                  <a:srgbClr val="22D3EE"/>
+                </a:solidFill>
+                <a:latin typeface="Aptos"/>
+              </a:rPr>
+              <a:t>HARDWARE_VALIDATED</a:t>
             </a:r>
           </a:p>
         </p:txBody>
@@ -5749,7 +5749,7 @@
         </p:nvSpPr>
         <p:spPr>
           <a:xfrm>
-            <a:off x="6309360" y="3273552"/>
+            <a:off x="6309360" y="3035808"/>
             <a:ext cx="4709160" cy="146304"/>
           </a:xfrm>
           <a:prstGeom prst="rect">
@@ -5775,7 +5775,7 @@
                 </a:solidFill>
                 <a:latin typeface="Aptos"/>
               </a:rPr>
-              <a:t>wins and losses with caveats</a:t>
+              <a:t>documented OS-to-bus path</a:t>
             </a:r>
           </a:p>
         </p:txBody>
@@ -5788,7 +5788,7 @@
         </p:nvSpPr>
         <p:spPr>
           <a:xfrm>
-            <a:off x="822960" y="3822191"/>
+            <a:off x="822960" y="3511296"/>
             <a:ext cx="10561320" cy="457200"/>
           </a:xfrm>
           <a:prstGeom prst="roundRect">
@@ -5835,7 +5835,7 @@
         </p:nvSpPr>
         <p:spPr>
           <a:xfrm>
-            <a:off x="1024128" y="3931919"/>
+            <a:off x="1024128" y="3621024"/>
             <a:ext cx="2743200" cy="146304"/>
           </a:xfrm>
           <a:prstGeom prst="rect">
@@ -5861,7 +5861,7 @@
                 </a:solidFill>
                 <a:latin typeface="Aptos"/>
               </a:rPr>
-              <a:t>Formal algebra</a:t>
+              <a:t>AX7020 board matrix</a:t>
             </a:r>
           </a:p>
         </p:txBody>
@@ -5874,7 +5874,7 @@
         </p:nvSpPr>
         <p:spPr>
           <a:xfrm>
-            <a:off x="3931920" y="3931919"/>
+            <a:off x="3931920" y="3621024"/>
             <a:ext cx="2194560" cy="146304"/>
           </a:xfrm>
           <a:prstGeom prst="rect">
@@ -5896,11 +5896,11 @@
             <a:r>
               <a:rPr sz="919" b="1">
                 <a:solidFill>
-                  <a:srgbClr val="A78BFA"/>
-                </a:solidFill>
-                <a:latin typeface="Aptos"/>
-              </a:rPr>
-              <a:t>FORMAL_PROOF*</a:t>
+                  <a:srgbClr val="60A5FA"/>
+                </a:solidFill>
+                <a:latin typeface="Aptos"/>
+              </a:rPr>
+              <a:t>LIVE_MEASURED</a:t>
             </a:r>
           </a:p>
         </p:txBody>
@@ -5913,7 +5913,7 @@
         </p:nvSpPr>
         <p:spPr>
           <a:xfrm>
-            <a:off x="6309360" y="3931919"/>
+            <a:off x="6309360" y="3621024"/>
             <a:ext cx="4709160" cy="146304"/>
           </a:xfrm>
           <a:prstGeom prst="rect">
@@ -5939,7 +5939,7 @@
                 </a:solidFill>
                 <a:latin typeface="Aptos"/>
               </a:rPr>
-              <a:t>Lean4-checked algebra; exact audited properties only</a:t>
+              <a:t>wins and losses with caveats</a:t>
             </a:r>
           </a:p>
         </p:txBody>
@@ -5952,7 +5952,7 @@
         </p:nvSpPr>
         <p:spPr>
           <a:xfrm>
-            <a:off x="822960" y="4480560"/>
+            <a:off x="822960" y="4096512"/>
             <a:ext cx="10561320" cy="457200"/>
           </a:xfrm>
           <a:prstGeom prst="roundRect">
@@ -5999,7 +5999,7 @@
         </p:nvSpPr>
         <p:spPr>
           <a:xfrm>
-            <a:off x="1024128" y="4590288"/>
+            <a:off x="1024128" y="4206240"/>
             <a:ext cx="2743200" cy="146304"/>
           </a:xfrm>
           <a:prstGeom prst="rect">
@@ -6025,6 +6025,170 @@
                 </a:solidFill>
                 <a:latin typeface="Aptos"/>
               </a:rPr>
+              <a:t>Formal algebra</a:t>
+            </a:r>
+          </a:p>
+        </p:txBody>
+      </p:sp>
+      <p:sp>
+        <p:nvSpPr>
+          <p:cNvPr id="26" name="TextBox 25"/>
+          <p:cNvSpPr txBox="1"/>
+          <p:nvPr/>
+        </p:nvSpPr>
+        <p:spPr>
+          <a:xfrm>
+            <a:off x="3931920" y="4206240"/>
+            <a:ext cx="2194560" cy="146304"/>
+          </a:xfrm>
+          <a:prstGeom prst="rect">
+            <a:avLst/>
+          </a:prstGeom>
+          <a:noFill/>
+        </p:spPr>
+        <p:txBody>
+          <a:bodyPr wrap="square" lIns="12700" rIns="12700" tIns="12700" bIns="12700" anchor="t">
+            <a:spAutoFit/>
+          </a:bodyPr>
+          <a:lstStyle/>
+          <a:p>
+            <a:pPr algn="l">
+              <a:spcAft>
+                <a:spcPts val="0"/>
+              </a:spcAft>
+            </a:pPr>
+            <a:r>
+              <a:rPr sz="919" b="1">
+                <a:solidFill>
+                  <a:srgbClr val="A78BFA"/>
+                </a:solidFill>
+                <a:latin typeface="Aptos"/>
+              </a:rPr>
+              <a:t>FORMAL_PROOF*</a:t>
+            </a:r>
+          </a:p>
+        </p:txBody>
+      </p:sp>
+      <p:sp>
+        <p:nvSpPr>
+          <p:cNvPr id="27" name="TextBox 26"/>
+          <p:cNvSpPr txBox="1"/>
+          <p:nvPr/>
+        </p:nvSpPr>
+        <p:spPr>
+          <a:xfrm>
+            <a:off x="6309360" y="4206240"/>
+            <a:ext cx="4709160" cy="146304"/>
+          </a:xfrm>
+          <a:prstGeom prst="rect">
+            <a:avLst/>
+          </a:prstGeom>
+          <a:noFill/>
+        </p:spPr>
+        <p:txBody>
+          <a:bodyPr wrap="square" lIns="12700" rIns="12700" tIns="12700" bIns="12700" anchor="t">
+            <a:spAutoFit/>
+          </a:bodyPr>
+          <a:lstStyle/>
+          <a:p>
+            <a:pPr algn="l">
+              <a:spcAft>
+                <a:spcPts val="0"/>
+              </a:spcAft>
+            </a:pPr>
+            <a:r>
+              <a:rPr sz="1000" b="0">
+                <a:solidFill>
+                  <a:srgbClr val="A5B4C5"/>
+                </a:solidFill>
+                <a:latin typeface="Aptos"/>
+              </a:rPr>
+              <a:t>Lean4-checked algebra; exact audited properties only</a:t>
+            </a:r>
+          </a:p>
+        </p:txBody>
+      </p:sp>
+      <p:sp>
+        <p:nvSpPr>
+          <p:cNvPr id="28" name="Rounded Rectangle 27"/>
+          <p:cNvSpPr/>
+          <p:nvPr/>
+        </p:nvSpPr>
+        <p:spPr>
+          <a:xfrm>
+            <a:off x="822960" y="4681728"/>
+            <a:ext cx="10561320" cy="457200"/>
+          </a:xfrm>
+          <a:prstGeom prst="roundRect">
+            <a:avLst>
+              <a:gd name="adj" fmla="val 8000"/>
+            </a:avLst>
+          </a:prstGeom>
+          <a:solidFill>
+            <a:srgbClr val="0C1420"/>
+          </a:solidFill>
+          <a:ln w="9525">
+            <a:solidFill>
+              <a:srgbClr val="24364D"/>
+            </a:solidFill>
+          </a:ln>
+        </p:spPr>
+        <p:style>
+          <a:lnRef idx="1">
+            <a:schemeClr val="accent1"/>
+          </a:lnRef>
+          <a:fillRef idx="3">
+            <a:schemeClr val="accent1"/>
+          </a:fillRef>
+          <a:effectRef idx="2">
+            <a:schemeClr val="accent1"/>
+          </a:effectRef>
+          <a:fontRef idx="minor">
+            <a:schemeClr val="lt1"/>
+          </a:fontRef>
+        </p:style>
+        <p:txBody>
+          <a:bodyPr rtlCol="0" anchor="ctr"/>
+          <a:lstStyle/>
+          <a:p>
+            <a:pPr algn="ctr"/>
+          </a:p>
+        </p:txBody>
+      </p:sp>
+      <p:sp>
+        <p:nvSpPr>
+          <p:cNvPr id="29" name="TextBox 28"/>
+          <p:cNvSpPr txBox="1"/>
+          <p:nvPr/>
+        </p:nvSpPr>
+        <p:spPr>
+          <a:xfrm>
+            <a:off x="1024128" y="4791456"/>
+            <a:ext cx="2743200" cy="146304"/>
+          </a:xfrm>
+          <a:prstGeom prst="rect">
+            <a:avLst/>
+          </a:prstGeom>
+          <a:noFill/>
+        </p:spPr>
+        <p:txBody>
+          <a:bodyPr wrap="square" lIns="12700" rIns="12700" tIns="12700" bIns="12700" anchor="t">
+            <a:spAutoFit/>
+          </a:bodyPr>
+          <a:lstStyle/>
+          <a:p>
+            <a:pPr algn="l">
+              <a:spcAft>
+                <a:spcPts val="0"/>
+              </a:spcAft>
+            </a:pPr>
+            <a:r>
+              <a:rPr sz="1019" b="1">
+                <a:solidFill>
+                  <a:srgbClr val="F5F8FF"/>
+                </a:solidFill>
+                <a:latin typeface="Aptos"/>
+              </a:rPr>
               <a:t>Standalone boot</a:t>
             </a:r>
           </a:p>
@@ -6032,13 +6196,13 @@
       </p:sp>
       <p:sp>
         <p:nvSpPr>
-          <p:cNvPr id="26" name="TextBox 25"/>
-          <p:cNvSpPr txBox="1"/>
-          <p:nvPr/>
-        </p:nvSpPr>
-        <p:spPr>
-          <a:xfrm>
-            <a:off x="3931920" y="4590288"/>
+          <p:cNvPr id="30" name="TextBox 29"/>
+          <p:cNvSpPr txBox="1"/>
+          <p:nvPr/>
+        </p:nvSpPr>
+        <p:spPr>
+          <a:xfrm>
+            <a:off x="3931920" y="4791456"/>
             <a:ext cx="2194560" cy="146304"/>
           </a:xfrm>
           <a:prstGeom prst="rect">
@@ -6071,13 +6235,13 @@
       </p:sp>
       <p:sp>
         <p:nvSpPr>
-          <p:cNvPr id="27" name="TextBox 26"/>
-          <p:cNvSpPr txBox="1"/>
-          <p:nvPr/>
-        </p:nvSpPr>
-        <p:spPr>
-          <a:xfrm>
-            <a:off x="6309360" y="4590288"/>
+          <p:cNvPr id="31" name="TextBox 30"/>
+          <p:cNvSpPr txBox="1"/>
+          <p:nvPr/>
+        </p:nvSpPr>
+        <p:spPr>
+          <a:xfrm>
+            <a:off x="6309360" y="4791456"/>
             <a:ext cx="4709160" cy="146304"/>
           </a:xfrm>
           <a:prstGeom prst="rect">
@@ -6110,7 +6274,7 @@
       </p:sp>
       <p:sp>
         <p:nvSpPr>
-          <p:cNvPr id="28" name="TextBox 27"/>
+          <p:cNvPr id="32" name="TextBox 31"/>
           <p:cNvSpPr txBox="1"/>
           <p:nvPr/>
         </p:nvSpPr>

--- a/business/friday_send/01_front_of_room/ATOMiK_Investor_Deck.pptx
+++ b/business/friday_send/01_front_of_room/ATOMiK_Investor_Deck.pptx
@@ -5296,7 +5296,7 @@
         </p:nvSpPr>
         <p:spPr>
           <a:xfrm>
-            <a:off x="822960" y="1755648"/>
+            <a:off x="822960" y="1691640"/>
             <a:ext cx="10561320" cy="457200"/>
           </a:xfrm>
           <a:prstGeom prst="roundRect">
@@ -5343,7 +5343,7 @@
         </p:nvSpPr>
         <p:spPr>
           <a:xfrm>
-            <a:off x="1024128" y="1865376"/>
+            <a:off x="1024128" y="1801368"/>
             <a:ext cx="2743200" cy="146304"/>
           </a:xfrm>
           <a:prstGeom prst="rect">
@@ -5382,7 +5382,7 @@
         </p:nvSpPr>
         <p:spPr>
           <a:xfrm>
-            <a:off x="3931920" y="1865376"/>
+            <a:off x="3931920" y="1801368"/>
             <a:ext cx="2194560" cy="146304"/>
           </a:xfrm>
           <a:prstGeom prst="rect">
@@ -5421,7 +5421,7 @@
         </p:nvSpPr>
         <p:spPr>
           <a:xfrm>
-            <a:off x="6309360" y="1865376"/>
+            <a:off x="6309360" y="1801368"/>
             <a:ext cx="4709160" cy="146304"/>
           </a:xfrm>
           <a:prstGeom prst="rect">
@@ -5460,7 +5460,7 @@
         </p:nvSpPr>
         <p:spPr>
           <a:xfrm>
-            <a:off x="822960" y="2340864"/>
+            <a:off x="822960" y="2221992"/>
             <a:ext cx="10561320" cy="457200"/>
           </a:xfrm>
           <a:prstGeom prst="roundRect">
@@ -5507,7 +5507,7 @@
         </p:nvSpPr>
         <p:spPr>
           <a:xfrm>
-            <a:off x="1024128" y="2450592"/>
+            <a:off x="1024128" y="2331720"/>
             <a:ext cx="2743200" cy="146304"/>
           </a:xfrm>
           <a:prstGeom prst="rect">
@@ -5533,7 +5533,7 @@
                 </a:solidFill>
                 <a:latin typeface="Aptos"/>
               </a:rPr>
-              <a:t>Parallel-bank throughput</a:t>
+              <a:t>Live Workloads demo</a:t>
             </a:r>
           </a:p>
         </p:txBody>
@@ -5546,7 +5546,7 @@
         </p:nvSpPr>
         <p:spPr>
           <a:xfrm>
-            <a:off x="3931920" y="2450592"/>
+            <a:off x="3931920" y="2331720"/>
             <a:ext cx="2194560" cy="146304"/>
           </a:xfrm>
           <a:prstGeom prst="rect">
@@ -5585,7 +5585,7 @@
         </p:nvSpPr>
         <p:spPr>
           <a:xfrm>
-            <a:off x="6309360" y="2450592"/>
+            <a:off x="6309360" y="2331720"/>
             <a:ext cx="4709160" cy="146304"/>
           </a:xfrm>
           <a:prstGeom prst="rect">
@@ -5611,7 +5611,7 @@
                 </a:solidFill>
                 <a:latin typeface="Aptos"/>
               </a:rPr>
-              <a:t>AX7020 8-bank accumulator scales 1/2/4/8x, byte-identical to software</a:t>
+              <a:t>first customer-facing workload on AX7020: 800 Mevents/s @ 8 banks, byte-identical</a:t>
             </a:r>
           </a:p>
         </p:txBody>
@@ -5624,7 +5624,7 @@
         </p:nvSpPr>
         <p:spPr>
           <a:xfrm>
-            <a:off x="822960" y="2926080"/>
+            <a:off x="822960" y="2752344"/>
             <a:ext cx="10561320" cy="457200"/>
           </a:xfrm>
           <a:prstGeom prst="roundRect">
@@ -5671,7 +5671,7 @@
         </p:nvSpPr>
         <p:spPr>
           <a:xfrm>
-            <a:off x="1024128" y="3035808"/>
+            <a:off x="1024128" y="2862072"/>
             <a:ext cx="2743200" cy="146304"/>
           </a:xfrm>
           <a:prstGeom prst="rect">
@@ -5697,7 +5697,7 @@
                 </a:solidFill>
                 <a:latin typeface="Aptos"/>
               </a:rPr>
-              <a:t>Linux userspace to FPGA</a:t>
+              <a:t>Parallel-bank throughput</a:t>
             </a:r>
           </a:p>
         </p:txBody>
@@ -5710,7 +5710,7 @@
         </p:nvSpPr>
         <p:spPr>
           <a:xfrm>
-            <a:off x="3931920" y="3035808"/>
+            <a:off x="3931920" y="2862072"/>
             <a:ext cx="2194560" cy="146304"/>
           </a:xfrm>
           <a:prstGeom prst="rect">
@@ -5732,11 +5732,11 @@
             <a:r>
               <a:rPr sz="919" b="1">
                 <a:solidFill>
-                  <a:srgbClr val="22D3EE"/>
-                </a:solidFill>
-                <a:latin typeface="Aptos"/>
-              </a:rPr>
-              <a:t>HARDWARE_VALIDATED</a:t>
+                  <a:srgbClr val="60A5FA"/>
+                </a:solidFill>
+                <a:latin typeface="Aptos"/>
+              </a:rPr>
+              <a:t>LIVE_MEASURED</a:t>
             </a:r>
           </a:p>
         </p:txBody>
@@ -5749,7 +5749,7 @@
         </p:nvSpPr>
         <p:spPr>
           <a:xfrm>
-            <a:off x="6309360" y="3035808"/>
+            <a:off x="6309360" y="2862072"/>
             <a:ext cx="4709160" cy="146304"/>
           </a:xfrm>
           <a:prstGeom prst="rect">
@@ -5775,7 +5775,7 @@
                 </a:solidFill>
                 <a:latin typeface="Aptos"/>
               </a:rPr>
-              <a:t>documented OS-to-bus path</a:t>
+              <a:t>AX7020 8-bank accumulator scales 1/2/4/8x, byte-identical to software</a:t>
             </a:r>
           </a:p>
         </p:txBody>
@@ -5788,7 +5788,7 @@
         </p:nvSpPr>
         <p:spPr>
           <a:xfrm>
-            <a:off x="822960" y="3511296"/>
+            <a:off x="822960" y="3282696"/>
             <a:ext cx="10561320" cy="457200"/>
           </a:xfrm>
           <a:prstGeom prst="roundRect">
@@ -5835,7 +5835,7 @@
         </p:nvSpPr>
         <p:spPr>
           <a:xfrm>
-            <a:off x="1024128" y="3621024"/>
+            <a:off x="1024128" y="3392424"/>
             <a:ext cx="2743200" cy="146304"/>
           </a:xfrm>
           <a:prstGeom prst="rect">
@@ -5861,7 +5861,7 @@
                 </a:solidFill>
                 <a:latin typeface="Aptos"/>
               </a:rPr>
-              <a:t>AX7020 board matrix</a:t>
+              <a:t>Linux userspace to FPGA</a:t>
             </a:r>
           </a:p>
         </p:txBody>
@@ -5874,7 +5874,7 @@
         </p:nvSpPr>
         <p:spPr>
           <a:xfrm>
-            <a:off x="3931920" y="3621024"/>
+            <a:off x="3931920" y="3392424"/>
             <a:ext cx="2194560" cy="146304"/>
           </a:xfrm>
           <a:prstGeom prst="rect">
@@ -5896,11 +5896,11 @@
             <a:r>
               <a:rPr sz="919" b="1">
                 <a:solidFill>
-                  <a:srgbClr val="60A5FA"/>
-                </a:solidFill>
-                <a:latin typeface="Aptos"/>
-              </a:rPr>
-              <a:t>LIVE_MEASURED</a:t>
+                  <a:srgbClr val="22D3EE"/>
+                </a:solidFill>
+                <a:latin typeface="Aptos"/>
+              </a:rPr>
+              <a:t>HARDWARE_VALIDATED</a:t>
             </a:r>
           </a:p>
         </p:txBody>
@@ -5913,7 +5913,7 @@
         </p:nvSpPr>
         <p:spPr>
           <a:xfrm>
-            <a:off x="6309360" y="3621024"/>
+            <a:off x="6309360" y="3392424"/>
             <a:ext cx="4709160" cy="146304"/>
           </a:xfrm>
           <a:prstGeom prst="rect">
@@ -5939,7 +5939,7 @@
                 </a:solidFill>
                 <a:latin typeface="Aptos"/>
               </a:rPr>
-              <a:t>wins and losses with caveats</a:t>
+              <a:t>documented OS-to-bus path</a:t>
             </a:r>
           </a:p>
         </p:txBody>
@@ -5952,7 +5952,7 @@
         </p:nvSpPr>
         <p:spPr>
           <a:xfrm>
-            <a:off x="822960" y="4096512"/>
+            <a:off x="822960" y="3813048"/>
             <a:ext cx="10561320" cy="457200"/>
           </a:xfrm>
           <a:prstGeom prst="roundRect">
@@ -5999,7 +5999,7 @@
         </p:nvSpPr>
         <p:spPr>
           <a:xfrm>
-            <a:off x="1024128" y="4206240"/>
+            <a:off x="1024128" y="3922776"/>
             <a:ext cx="2743200" cy="146304"/>
           </a:xfrm>
           <a:prstGeom prst="rect">
@@ -6025,7 +6025,7 @@
                 </a:solidFill>
                 <a:latin typeface="Aptos"/>
               </a:rPr>
-              <a:t>Formal algebra</a:t>
+              <a:t>AX7020 board matrix</a:t>
             </a:r>
           </a:p>
         </p:txBody>
@@ -6038,7 +6038,7 @@
         </p:nvSpPr>
         <p:spPr>
           <a:xfrm>
-            <a:off x="3931920" y="4206240"/>
+            <a:off x="3931920" y="3922776"/>
             <a:ext cx="2194560" cy="146304"/>
           </a:xfrm>
           <a:prstGeom prst="rect">
@@ -6060,11 +6060,11 @@
             <a:r>
               <a:rPr sz="919" b="1">
                 <a:solidFill>
-                  <a:srgbClr val="A78BFA"/>
-                </a:solidFill>
-                <a:latin typeface="Aptos"/>
-              </a:rPr>
-              <a:t>FORMAL_PROOF*</a:t>
+                  <a:srgbClr val="60A5FA"/>
+                </a:solidFill>
+                <a:latin typeface="Aptos"/>
+              </a:rPr>
+              <a:t>LIVE_MEASURED</a:t>
             </a:r>
           </a:p>
         </p:txBody>
@@ -6077,7 +6077,7 @@
         </p:nvSpPr>
         <p:spPr>
           <a:xfrm>
-            <a:off x="6309360" y="4206240"/>
+            <a:off x="6309360" y="3922776"/>
             <a:ext cx="4709160" cy="146304"/>
           </a:xfrm>
           <a:prstGeom prst="rect">
@@ -6103,7 +6103,7 @@
                 </a:solidFill>
                 <a:latin typeface="Aptos"/>
               </a:rPr>
-              <a:t>Lean4-checked algebra; exact audited properties only</a:t>
+              <a:t>wins and losses with caveats</a:t>
             </a:r>
           </a:p>
         </p:txBody>
@@ -6116,7 +6116,7 @@
         </p:nvSpPr>
         <p:spPr>
           <a:xfrm>
-            <a:off x="822960" y="4681728"/>
+            <a:off x="822960" y="4343400"/>
             <a:ext cx="10561320" cy="457200"/>
           </a:xfrm>
           <a:prstGeom prst="roundRect">
@@ -6163,7 +6163,7 @@
         </p:nvSpPr>
         <p:spPr>
           <a:xfrm>
-            <a:off x="1024128" y="4791456"/>
+            <a:off x="1024128" y="4453128"/>
             <a:ext cx="2743200" cy="146304"/>
           </a:xfrm>
           <a:prstGeom prst="rect">
@@ -6189,6 +6189,170 @@
                 </a:solidFill>
                 <a:latin typeface="Aptos"/>
               </a:rPr>
+              <a:t>Formal algebra</a:t>
+            </a:r>
+          </a:p>
+        </p:txBody>
+      </p:sp>
+      <p:sp>
+        <p:nvSpPr>
+          <p:cNvPr id="30" name="TextBox 29"/>
+          <p:cNvSpPr txBox="1"/>
+          <p:nvPr/>
+        </p:nvSpPr>
+        <p:spPr>
+          <a:xfrm>
+            <a:off x="3931920" y="4453128"/>
+            <a:ext cx="2194560" cy="146304"/>
+          </a:xfrm>
+          <a:prstGeom prst="rect">
+            <a:avLst/>
+          </a:prstGeom>
+          <a:noFill/>
+        </p:spPr>
+        <p:txBody>
+          <a:bodyPr wrap="square" lIns="12700" rIns="12700" tIns="12700" bIns="12700" anchor="t">
+            <a:spAutoFit/>
+          </a:bodyPr>
+          <a:lstStyle/>
+          <a:p>
+            <a:pPr algn="l">
+              <a:spcAft>
+                <a:spcPts val="0"/>
+              </a:spcAft>
+            </a:pPr>
+            <a:r>
+              <a:rPr sz="919" b="1">
+                <a:solidFill>
+                  <a:srgbClr val="A78BFA"/>
+                </a:solidFill>
+                <a:latin typeface="Aptos"/>
+              </a:rPr>
+              <a:t>FORMAL_PROOF*</a:t>
+            </a:r>
+          </a:p>
+        </p:txBody>
+      </p:sp>
+      <p:sp>
+        <p:nvSpPr>
+          <p:cNvPr id="31" name="TextBox 30"/>
+          <p:cNvSpPr txBox="1"/>
+          <p:nvPr/>
+        </p:nvSpPr>
+        <p:spPr>
+          <a:xfrm>
+            <a:off x="6309360" y="4453128"/>
+            <a:ext cx="4709160" cy="146304"/>
+          </a:xfrm>
+          <a:prstGeom prst="rect">
+            <a:avLst/>
+          </a:prstGeom>
+          <a:noFill/>
+        </p:spPr>
+        <p:txBody>
+          <a:bodyPr wrap="square" lIns="12700" rIns="12700" tIns="12700" bIns="12700" anchor="t">
+            <a:spAutoFit/>
+          </a:bodyPr>
+          <a:lstStyle/>
+          <a:p>
+            <a:pPr algn="l">
+              <a:spcAft>
+                <a:spcPts val="0"/>
+              </a:spcAft>
+            </a:pPr>
+            <a:r>
+              <a:rPr sz="1000" b="0">
+                <a:solidFill>
+                  <a:srgbClr val="A5B4C5"/>
+                </a:solidFill>
+                <a:latin typeface="Aptos"/>
+              </a:rPr>
+              <a:t>Lean4-checked algebra; exact audited properties only</a:t>
+            </a:r>
+          </a:p>
+        </p:txBody>
+      </p:sp>
+      <p:sp>
+        <p:nvSpPr>
+          <p:cNvPr id="32" name="Rounded Rectangle 31"/>
+          <p:cNvSpPr/>
+          <p:nvPr/>
+        </p:nvSpPr>
+        <p:spPr>
+          <a:xfrm>
+            <a:off x="822960" y="4873752"/>
+            <a:ext cx="10561320" cy="457200"/>
+          </a:xfrm>
+          <a:prstGeom prst="roundRect">
+            <a:avLst>
+              <a:gd name="adj" fmla="val 8000"/>
+            </a:avLst>
+          </a:prstGeom>
+          <a:solidFill>
+            <a:srgbClr val="0C1420"/>
+          </a:solidFill>
+          <a:ln w="9525">
+            <a:solidFill>
+              <a:srgbClr val="24364D"/>
+            </a:solidFill>
+          </a:ln>
+        </p:spPr>
+        <p:style>
+          <a:lnRef idx="1">
+            <a:schemeClr val="accent1"/>
+          </a:lnRef>
+          <a:fillRef idx="3">
+            <a:schemeClr val="accent1"/>
+          </a:fillRef>
+          <a:effectRef idx="2">
+            <a:schemeClr val="accent1"/>
+          </a:effectRef>
+          <a:fontRef idx="minor">
+            <a:schemeClr val="lt1"/>
+          </a:fontRef>
+        </p:style>
+        <p:txBody>
+          <a:bodyPr rtlCol="0" anchor="ctr"/>
+          <a:lstStyle/>
+          <a:p>
+            <a:pPr algn="ctr"/>
+          </a:p>
+        </p:txBody>
+      </p:sp>
+      <p:sp>
+        <p:nvSpPr>
+          <p:cNvPr id="33" name="TextBox 32"/>
+          <p:cNvSpPr txBox="1"/>
+          <p:nvPr/>
+        </p:nvSpPr>
+        <p:spPr>
+          <a:xfrm>
+            <a:off x="1024128" y="4983480"/>
+            <a:ext cx="2743200" cy="146304"/>
+          </a:xfrm>
+          <a:prstGeom prst="rect">
+            <a:avLst/>
+          </a:prstGeom>
+          <a:noFill/>
+        </p:spPr>
+        <p:txBody>
+          <a:bodyPr wrap="square" lIns="12700" rIns="12700" tIns="12700" bIns="12700" anchor="t">
+            <a:spAutoFit/>
+          </a:bodyPr>
+          <a:lstStyle/>
+          <a:p>
+            <a:pPr algn="l">
+              <a:spcAft>
+                <a:spcPts val="0"/>
+              </a:spcAft>
+            </a:pPr>
+            <a:r>
+              <a:rPr sz="1019" b="1">
+                <a:solidFill>
+                  <a:srgbClr val="F5F8FF"/>
+                </a:solidFill>
+                <a:latin typeface="Aptos"/>
+              </a:rPr>
               <a:t>Standalone boot</a:t>
             </a:r>
           </a:p>
@@ -6196,13 +6360,13 @@
       </p:sp>
       <p:sp>
         <p:nvSpPr>
-          <p:cNvPr id="30" name="TextBox 29"/>
-          <p:cNvSpPr txBox="1"/>
-          <p:nvPr/>
-        </p:nvSpPr>
-        <p:spPr>
-          <a:xfrm>
-            <a:off x="3931920" y="4791456"/>
+          <p:cNvPr id="34" name="TextBox 33"/>
+          <p:cNvSpPr txBox="1"/>
+          <p:nvPr/>
+        </p:nvSpPr>
+        <p:spPr>
+          <a:xfrm>
+            <a:off x="3931920" y="4983480"/>
             <a:ext cx="2194560" cy="146304"/>
           </a:xfrm>
           <a:prstGeom prst="rect">
@@ -6235,13 +6399,13 @@
       </p:sp>
       <p:sp>
         <p:nvSpPr>
-          <p:cNvPr id="31" name="TextBox 30"/>
-          <p:cNvSpPr txBox="1"/>
-          <p:nvPr/>
-        </p:nvSpPr>
-        <p:spPr>
-          <a:xfrm>
-            <a:off x="6309360" y="4791456"/>
+          <p:cNvPr id="35" name="TextBox 34"/>
+          <p:cNvSpPr txBox="1"/>
+          <p:nvPr/>
+        </p:nvSpPr>
+        <p:spPr>
+          <a:xfrm>
+            <a:off x="6309360" y="4983480"/>
             <a:ext cx="4709160" cy="146304"/>
           </a:xfrm>
           <a:prstGeom prst="rect">
@@ -6274,7 +6438,7 @@
       </p:sp>
       <p:sp>
         <p:nvSpPr>
-          <p:cNvPr id="32" name="TextBox 31"/>
+          <p:cNvPr id="36" name="TextBox 35"/>
           <p:cNvSpPr txBox="1"/>
           <p:nvPr/>
         </p:nvSpPr>
